--- a/slides/study-perception/study-perception.pptx
+++ b/slides/study-perception/study-perception.pptx
@@ -539,7 +539,7 @@
           <a:lstStyle/>
           <a:p>
             <a:r>
-              <a:t>이 덱은 로봇 내비게이션의 인식을 처음 공부하는 사람을 위한 개념 덱이다. 센서 점군과 영상을 계획기가 읽을 수 있는 지도와 장애물 목록으로 바꾸는 과정을 따라간다. 그림 대부분은 작은 장면을 실제로 계산해 그렸고, 논문 그림에는 출처를 달았다.</a:t>
+              <a:t>이 덱은 로봇 내비게이션의 인식을 처음 공부하는 사람을 위한 개념 덱이다. 센서 점군과 영상을 Planner가 읽을 수 있는 지도와 장애물 목록으로 바꾸는 과정을 따라간다. 그림 대부분은 작은 장면을 실제로 계산해 그렸고, 논문 그림에는 출처를 달았다.</a:t>
             </a:r>
           </a:p>
         </p:txBody>
@@ -679,7 +679,7 @@
           <a:lstStyle/>
           <a:p>
             <a:r>
-              <a:t>턱이나 벽 같은 양의 장애물은 센서에 크게 보이지만, 구덩이나 내림 턱 같은 음의 장애물은 직접 보이지 않는다. 센서가 낮을수록, 멀수록 앞 모서리가 바닥을 가린다. 그림 (b)처럼 생각보다 훨씬 가까이 가야 바닥이 보인다. 그래서 "점이 없다"는 사실 자체를 신호로 써야 한다. 그림자의 위치와 크기, 광선이 지나간 높이, 주변 지면에서 외삽한 기대 높이가 그 신호다. 보수적으로 다루면 오탐으로 멈추고, 느슨하면 빠진다.</a:t>
+              <a:t>턱이나 벽 같은 양의 장애물은 센서에 크게 보이지만, 구덩이나 내림 턱 같은 음의 장애물은 직접 보이지 않는다. 센서가 낮을수록, 멀수록 앞 모서리가 바닥을 가린다. 그림 (b)처럼 생각보다 훨씬 가까이 가야 바닥이 보인다. 그래서 "점이 없다"는 사실 자체를 신호로 써야 한다. 그림자의 위치와 크기, 광선이 지나간 높이, 주변 지면에서 외삽한 기대 높이가 그 신호다. 보수적으로 다루면 오탐으로 멈추고, 느슨하게 다루면 구덩이를 놓친다.</a:t>
             </a:r>
           </a:p>
         </p:txBody>
@@ -959,7 +959,7 @@
           <a:lstStyle/>
           <a:p>
             <a:r>
-              <a:t>둘째 장은 지도를 비용으로 바꾸는 traversability다. 기하 특징으로 만드는 규칙 비용, 사람 라벨에서 로봇 경험으로 옮겨 간 계보, 그리고 자기지도 학습의 핵심 난제인 PU 문제, 듬성한 라벨을 채우는 공간 보간, VLM의 역할을 본다.</a:t>
+              <a:t>둘째 장은 지도를 비용으로 바꾸는 traversability다. 기하 특징으로 만드는 규칙 비용, 사람 라벨에서 로봇 경험으로 옮겨 간 계보, 그리고 자기지도 학습의 핵심 난제인 PU 문제, 듬성한 라벨을 채우는 공간 보간, VLM의 역할을 살펴본다.</a:t>
             </a:r>
           </a:p>
         </p:txBody>
@@ -1099,7 +1099,7 @@
           <a:lstStyle/>
           <a:p>
             <a:r>
-              <a:t>traversability 라벨은 사람이 단 의미 라벨에서 로봇이 실제로 겪은 사건으로 옮겨 왔다. 사람 라벨은 비싸고, 도시용 분할 모델은 오프로드에서 무너진다. 사건 라벨은 다르다. 충돌, 덜컹거림, 미끄러짐을 센서로 재서 그 직전에 본 영상과 짝짓는다. 그러면 기하만 보는 로봇이 벽으로 보던 키 큰 풀밭도 실제로는 지나갈 수 있다는 것을 배운다. BADGR는 사건 예측과 표본 기반 계획을 결합한 원형이다.</a:t>
+              <a:t>traversability 라벨은 사람이 단 의미 라벨에서 로봇이 실제로 겪은 사건으로 옮겨 왔다. 사람 라벨은 비싸고, 도시용 분할 모델은 오프로드에서 무너진다. 사건 라벨은 다르다. 충돌, 덜컹거림, 미끄러짐을 센서로 재서 그 직전에 본 영상과 짝짓는다. 그러면 기하만 보는 로봇이 벽으로 보던 키 큰 풀밭도 실제로는 지나갈 수 있다는 것을 배운다. BADGR는 사건 예측과 샘플 기반 계획을 결합한 원형이다.</a:t>
             </a:r>
           </a:p>
         </p:txBody>
@@ -1169,7 +1169,7 @@
           <a:lstStyle/>
           <a:p>
             <a:r>
-              <a:t>자기지도 traversability의 근본 문제는 음성 라벨이 없다는 것이다. 로봇은 위험한 곳을 피해 다니므로, 지나간 곳은 확실히 갈 수 있는 곳이지만, 안 간 곳이 못 가는 곳이라는 뜻은 아니다. 이것을 양성-무라벨, PU 학습이라 한다. 안 간 곳을 모두 음성으로 두면 가 보지 않은 좋은 길까지 위험으로 배운다. 세 가지 해법이 있다. 음성을 합성하거나, 양성 분포 밖을 이상으로 보거나, 손실을 PU에 맞게 보정한다. 가장 단순한 방법은 라벨 없는 칸을 손실에서 아예 빼는 것이다.</a:t>
+              <a:t>자기지도 traversability의 근본 문제는 음성 라벨이 없다는 것이다. 로봇은 위험한 곳을 피해 다니므로, 지나간 곳은 확실히 갈 수 있는 곳이지만, 안 간 곳이 못 가는 곳이라는 뜻은 아니다. 이것을 PU(positive-unlabeled) 학습이라 한다. 안 간 곳을 모두 음성으로 두면 가 보지 않은 좋은 길까지 위험으로 배운다. 세 가지 해법이 있다. 음성을 합성하거나, 양성 분포 밖을 이상으로 보거나, 손실을 PU에 맞게 보정한다. 가장 단순한 방법은 라벨 없는 칸을 손실에서 아예 빼는 것이다.</a:t>
             </a:r>
           </a:p>
         </p:txBody>
@@ -1239,7 +1239,7 @@
           <a:lstStyle/>
           <a:p>
             <a:r>
-              <a:t>로봇이 지나간 자국이나 측정한 진동은 지도 전체에서 보면 아주 듬성하다. 이것을 주변 칸으로 퍼뜨려야 계획에 쓸 수 있다. 베이즈 커널 추론은 각 관측을 거리에 따라 줄어드는 가중치로 더한 뒤, 가중치의 합을 증거의 양으로 본다. 관측이 많으면 확신하고, 없으면 사전값과 큰 불확실성으로 돌아간다. 가우시안 과정과 비슷한 결과를 훨씬 싸게 얻는다. 다만 커널이 날카로운 경계를 흐리므로, 턱처럼 급변하는 곳은 기하 규칙이 맡는 것이 좋다.</a:t>
+              <a:t>로봇이 지나간 자국이나 측정한 진동은 지도 전체에서 보면 아주 듬성하다. 이것을 주변 칸으로 퍼뜨려야 계획에 쓸 수 있다. 베이즈 커널 추론은 각 관측을 거리에 따라 줄어드는 가중치로 더한 뒤, 가중치의 합을 증거의 양으로 본다. 관측이 많으면 확신하고, 없으면 사전값과 큰 불확실성으로 돌아간다. GP와 비슷한 결과를 훨씬 싸게 얻는다. 다만 커널이 날카로운 경계를 흐리므로, 턱처럼 급변하는 곳은 기하 규칙이 맡는 것이 좋다.</a:t>
             </a:r>
           </a:p>
         </p:txBody>
@@ -1519,7 +1519,7 @@
           <a:lstStyle/>
           <a:p>
             <a:r>
-              <a:t>셋째 장은 영상 쪽이다. 시각 기반 모델을 어디에 쓰는지, 단안 깊이의 한계, 그리고 사람 같은 동적 장애물을 검출하고 추적하고 예측하는 흐름을 본다. 마지막으로 예측이 완벽해도 로봇이 얼어붙는 문제와, 예측의 불확실성을 보정하는 법을 본다.</a:t>
+              <a:t>셋째 장은 영상 쪽이다. 시각 기반 모델을 어디에 쓰는지, 단안 깊이의 한계, 그리고 사람 같은 동적 장애물을 검출하고 추적하고 예측하는 흐름을 살펴본다. 마지막으로 예측이 완벽해도 로봇이 얼어붙는 문제와, 예측의 불확실성을 보정하는 법을 다룬다.</a:t>
             </a:r>
           </a:p>
         </p:txBody>
@@ -1589,7 +1589,7 @@
           <a:lstStyle/>
           <a:p>
             <a:r>
-              <a:t>2023년 이후 로봇 인식의 출발점은 과제별 모델이 아니라 시각 기반 모델이다. 그러나 임베디드 GPU에서 큰 백본을 매 프레임 돌리기는 아직 부담이다. 그래서 흔한 사용법은 교사다. 오프라인에서 큰 모델로 마스크, 상자, 깊이 같은 가짜 라벨을 만들고, 그것으로 작은 실시간 모델을 학습한다. 고정 특징 위에 작은 머리만 온라인으로 학습하는 방법도 있다. 제품에 쓸 때는 가중치 라이선스를 반드시 확인해야 한다.</a:t>
+              <a:t>2023년 이후 로봇 인식의 출발점은 과제별 모델이 아니라 시각 기반 모델(vision foundation model)이다. 그러나 임베디드 GPU에서 큰 백본을 매 프레임 돌리기는 아직 부담이다. 그래서 흔한 사용법은 교사다. 오프라인에서 큰 모델로 마스크, 상자, 깊이 같은 pseudo-label을 만들고, 그것으로 작은 실시간 모델을 학습한다. 고정 특징 위에 작은 head만 온라인으로 학습하는 방법도 있다. 제품에 쓸 때는 가중치 라이선스를 반드시 확인해야 한다.</a:t>
             </a:r>
           </a:p>
         </p:txBody>
@@ -1659,7 +1659,7 @@
           <a:lstStyle/>
           <a:p>
             <a:r>
-              <a:t>학습 단안 깊이 모델은 놀라울 만큼 그럴듯한 깊이를 낸다. 하지만 한 장의 영상에는 절대 거리 정보가 없어서, 상대 깊이 모델은 축척을 모르고 미터 깊이 모델도 학습 분포 밖의 카메라에서 축척이 틀린다. 더 큰 문제는 틀릴 때 조용히 틀린다는 것이다. 그래서 안전 거리는 LiDAR나 스테레오가 맡고, 단안 깊이는 성긴 점 사이를 채우거나 라벨을 만드는 보조로 쓰는 것이 안전하다.</a:t>
+              <a:t>학습 단안 깊이 모델은 놀라울 만큼 그럴듯한 깊이를 낸다. 하지만 한 장의 영상에는 절대 거리 정보가 없어서, 상대 깊이 모델은 스케일을 모르고 미터 깊이 모델도 학습 분포 밖의 카메라에서 스케일이 틀린다. 더 큰 문제는 틀릴 때 조용히 틀린다는 것이다. 그래서 안전 거리는 LiDAR나 스테레오가 맡고, 단안 깊이는 성긴 점 사이를 채우거나 라벨을 만드는 보조로 쓰는 것이 안전하다.</a:t>
             </a:r>
           </a:p>
         </p:txBody>
@@ -1869,7 +1869,7 @@
           <a:lstStyle/>
           <a:p>
             <a:r>
-              <a:t>이 장에서 하나만 기억한다면 이것이다. 예측을 아무리 잘해도, 예측이 로봇의 행동에 반응하지 않는다고 가정하면 조밀한 군중 앞에서 로봇은 얼어붙는다. 사람은 실제로 로봇에게 길을 비켜 주기 때문이다. 해법은 예측과 계획을 결합해, 로봇이 움직이면 사람도 반응한다는 상호작용을 모델에 넣는 것이다. 표는 안전만 키우면 충돌이 타임아웃으로 바뀐다는 것을 숫자로 보여 준다. 안전 비용과 함께 살아 움직이게 하는 장치가 필요하다.</a:t>
+              <a:t>이 장에서 하나만 기억한다면 이것이다. 예측을 아무리 잘해도, 예측이 로봇의 행동에 반응하지 않는다고 가정하면 조밀한 군중 앞에서 로봇은 얼어붙는다. 사람은 실제로 로봇에게 길을 비켜 주기 때문이다. 해법은 예측과 계획을 결합해, 로봇이 움직이면 사람도 반응한다는 상호작용을 모델에 넣는 것이다. 표는 안전만 키우면 충돌이 타임아웃으로 바뀐다는 것을 숫자로 보여 준다. 안전 비용과 함께 로봇을 계속 움직이게 하는 장치가 필요하다.</a:t>
             </a:r>
           </a:p>
         </p:txBody>
@@ -1939,7 +1939,7 @@
           <a:lstStyle/>
           <a:p>
             <a:r>
-              <a:t>예측기가 내는 불확실성이 틀리면, 그것을 쓰는 안전 장치도 틀린다. 보정은 두 시점에서 할 수 있다. 학습 때는 예측 분포가 실제 오차의 분포와 맞도록 손실을 주고, 배포 중에는 최근 오차의 순위로 반경을 계속 맞춘다. conformal prediction은 보정 자료의 오차만 있으면 분포 가정 없이 포함률을 보장하는 간단하고 강력한 방법이다. 다만 자료가 적으면 실제 포함률이 크게 흔들린다.</a:t>
+              <a:t>예측기가 내는 불확실성이 틀리면, 그것을 쓰는 안전 장치도 틀린다. 보정은 두 시점에서 할 수 있다. 학습 때는 예측 분포가 실제 오차의 분포와 맞도록 손실을 주고, 배포 중에는 최근 오차의 순위로 반경을 계속 맞춘다. conformal prediction은 보정 데이터의 오차만 있으면 분포 가정 없이 포함률을 보장하는 간단하고 강력한 방법이다. 다만 데이터가 적으면 실제 포함률이 크게 흔들린다.</a:t>
             </a:r>
           </a:p>
         </p:txBody>
@@ -2149,7 +2149,7 @@
           <a:lstStyle/>
           <a:p>
             <a:r>
-              <a:t>마지막 장은 인식이 시스템 전체에 주는 제약과 복습이다. 센서에서 바퀴까지의 지연과 탐지 거리가 최고 속도를 어떻게 묶는지 보고, 로봇 형태에 따라 인식 설계가 어떻게 달라지는지, 그리고 복습용 표와 공부 순서를 정리한다.</a:t>
+              <a:t>마지막 장은 인식이 시스템 전체에 주는 제약과 복습이다. 센서에서 바퀴까지의 지연과 탐지 거리가 최고 속도를 어떻게 제한하는지 살펴보고, 로봇 형태에 따라 인식 설계가 어떻게 달라지는지, 그리고 복습용 표와 공부 순서를 정리한다.</a:t>
             </a:r>
           </a:p>
         </p:txBody>
@@ -2219,7 +2219,7 @@
           <a:lstStyle/>
           <a:p>
             <a:r>
-              <a:t>인식은 시스템의 속도 상한을 정한다. 장애물을 보고 나서 바퀴가 반응하기까지의 지연 동안 로봇은 그대로 달리고, 그 뒤에 제동 거리가 더해진다. 이 둘의 합이 탐지 거리보다 작아야 한다. 구덩이처럼 가까이 가야 보이는 장애물은 탐지 거리가 짧으므로 속도가 크게 묶인다. 그래프처럼 탐지 거리가 1.5 m면 지연을 0.3초에서 0.6초로 늘릴 때 최고 속도가 눈에 띄게 준다. 시뮬레이션에 지연을 넣지 않으면 이 제약을 놓친다.</a:t>
+              <a:t>인식은 시스템의 속도 상한을 정한다. 장애물을 보고 나서 바퀴가 반응하기까지의 지연 동안 로봇은 그대로 달리고, 그 뒤에 제동 거리가 더해진다. 이 둘의 합이 탐지 거리보다 작아야 한다. 구덩이처럼 가까이 가야 보이는 장애물은 탐지 거리가 짧으므로 속도가 크게 제한된다. 그래프처럼 탐지 거리가 1.5 m면 지연을 0.3초에서 0.6초로 늘릴 때 최고 속도가 눈에 띄게 준다. 시뮬레이션에 지연을 넣지 않으면 이 제약을 놓친다.</a:t>
             </a:r>
           </a:p>
         </p:txBody>
@@ -2289,7 +2289,7 @@
           <a:lstStyle/>
           <a:p>
             <a:r>
-              <a:t>같은 인식 기술도 로봇의 몸에 따라 무게중심이 다르다. 자동차는 멀리 빨리 봐야 하고, 보행 로봇은 발 디딜 곳을 정확히 봐야 하고, 바퀴 로봇은 낮은 턱과 구덩이, 가까운 사람이 문제다. 4족 보행 분야가 키운 elevation mapping 스택이 휴머노이드와 바퀴 로봇에서 재사용되는 것은 문제 설정이 닮았기 때문이다. 여러 분야를 가로지르는 교훈은 하나다. 불확실성을 함께 다루면 완벽한 재구성이 없어도 된다.</a:t>
+              <a:t>같은 인식 기술도 로봇의 몸에 따라 무게중심이 다르다. 자동차는 멀리 빨리 봐야 하고, 보행 로봇은 foothold를 정확히 봐야 하고, 바퀴 로봇은 낮은 턱과 구덩이, 가까운 사람이 문제다. 4족 보행 분야가 키운 elevation mapping 스택이 휴머노이드와 바퀴 로봇에서 재사용되는 것은 문제 설정이 닮았기 때문이다. 여러 분야를 가로지르는 교훈은 하나다. 불확실성을 함께 다루면 완벽한 재구성이 없어도 된다.</a:t>
             </a:r>
           </a:p>
         </p:txBody>
@@ -2499,7 +2499,7 @@
           <a:lstStyle/>
           <a:p>
             <a:r>
-              <a:t>순서는 확률적 기초, 직접 구현, 학습 인식이다. 확률 로봇공학 교과서의 베이즈 필터와 점유 격자 장이 이 덱 1장의 바탕이다. 이 덱의 그림처럼 광선 투사와 log-odds 격자, 칼만 추적은 각각 수십 줄로 구현할 수 있다. 그 다음에 학습 기반 traversability와 시각 기반 모델 논문을 읽으면 무엇이 새로운지 분명히 보인다.</a:t>
+              <a:t>순서는 확률적 기초, 직접 구현, 학습 인식이다. 확률 로봇공학 교과서의 베이즈 필터와 occupancy grid 장이 이 덱 1장의 바탕이다. 이 덱의 그림처럼 광선 투사와 log-odds 격자, 칼만 추적은 각각 수십 줄로 구현할 수 있다. 그 다음에 학습 기반 traversability와 시각 기반 모델 논문을 읽으면 무엇이 새로운지 분명히 보인다.</a:t>
             </a:r>
           </a:p>
         </p:txBody>
@@ -2569,7 +2569,7 @@
           <a:lstStyle/>
           <a:p>
             <a:r>
-              <a:t>오늘 본 것을 여섯 상자로 줄였다. 인식의 목표는 완벽한 3D 재구성이 아니라, 계획기가 안전하게 결정할 수 있을 만큼의 지도와 그 지도의 신뢰도를 주는 것이다. 모르는 곳을 모른다고 알려 주는 것, 그리고 그 불확실성이 실제로 맞는지 재는 것이 안전의 핵심이다.</a:t>
+              <a:t>오늘 본 것을 여섯 상자로 줄였다. 인식의 목표는 완벽한 3D 재구성이 아니라, Planner가 안전하게 결정할 수 있을 만큼의 지도와 그 지도의 신뢰도를 주는 것이다. 모르는 곳을 모른다고 알려 주는 것, 그리고 그 불확실성이 실제로 맞는지 재는 것이 안전의 핵심이다.</a:t>
             </a:r>
           </a:p>
         </p:txBody>
@@ -2989,7 +2989,7 @@
           <a:lstStyle/>
           <a:p>
             <a:r>
-              <a:t>첫째 장은 지도를 만드는 법이다. 2D 점유 격자의 log-odds 갱신, 2.5D 높이 지도의 칼만 융합, 실제 구현인 elevation mapping, 그리고 보도에서 가장 위험한 음의 장애물과 못 본 칸을 다룬다.</a:t>
+              <a:t>첫째 장은 지도를 만드는 법이다. 2D occupancy grid의 log-odds 갱신, 2.5D 높이 지도의 칼만 융합, 실제 구현인 elevation mapping, 그리고 보도에서 가장 위험한 음의 장애물과 못 본 칸을 다룬다.</a:t>
             </a:r>
           </a:p>
         </p:txBody>
@@ -3059,7 +3059,7 @@
           <a:lstStyle/>
           <a:p>
             <a:r>
-              <a:t>점유 확률을 그대로 곱하면 계산이 번거롭다. log-odds, 즉 확률 비의 로그로 바꾸면 베이즈 갱신이 덧셈이 된다. 광선이 지나간 칸에는 비었다는 증거로 음수를, 광선이 끝난 칸에는 점유 증거로 양수를 더한다. 값을 상한과 하한으로 자르면 오래된 증거에 갇히지 않아 문이 열리고 닫히는 변화도 따라간다. 실내 2D 내비게이션의 표준이지만, 실외의 경사와 턱은 담지 못한다.</a:t>
+              <a:t>occupancy 확률을 그대로 곱하면 계산이 번거롭다. log-odds, 즉 확률 비의 로그로 바꾸면 베이즈 갱신이 덧셈이 된다. 광선이 지나간 칸에는 비었다는 증거로 음수를, 광선이 끝난 칸에는 막혔다는 증거로 양수를 더한다. 값을 상한과 하한으로 자르면 오래된 증거에 갇히지 않아 문이 열리고 닫히는 변화도 따라간다. 실내 2D 내비게이션의 표준이지만, 실외의 경사와 턱은 담지 못한다.</a:t>
             </a:r>
           </a:p>
         </p:txBody>
@@ -6279,7 +6279,7 @@
                 <a:ea typeface="Malgun Gothic"/>
                 <a:cs typeface="Malgun Gothic"/>
               </a:rPr>
-              <a:t>점유 격자와 높이 지도, 음의 장애물과 못 본 칸, traversability 자기지도, 시각 기반 모델, 사람 검출·추적·예측까지 — 그림과 배경지식과 장단점으로 보는 내비게이션 인식</a:t>
+              <a:t>occupancy grid와 높이 지도, 음의 장애물과 못 본 칸, traversability 자기지도, 시각 기반 모델, 사람 검출·추적·예측까지 — 그림과 배경지식과 장단점으로 보는 내비게이션 인식</a:t>
             </a:r>
           </a:p>
         </p:txBody>
@@ -6293,7 +6293,7 @@
         <p:spPr>
           <a:xfrm>
             <a:off x="812800" y="5765800"/>
-            <a:ext cx="1560512" cy="330200"/>
+            <a:ext cx="2012950" cy="330200"/>
           </a:xfrm>
           <a:prstGeom prst="roundRect">
             <a:avLst>
@@ -6324,7 +6324,7 @@
         <p:spPr>
           <a:xfrm>
             <a:off x="952500" y="5816600"/>
-            <a:ext cx="1344946" cy="336550"/>
+            <a:ext cx="1810956" cy="336550"/>
           </a:xfrm>
           <a:prstGeom prst="rect">
             <a:avLst/>
@@ -6351,7 +6351,7 @@
                 <a:ea typeface="Malgun Gothic"/>
                 <a:cs typeface="Malgun Gothic"/>
               </a:rPr>
-              <a:t>점유 격자 · 높이 지도</a:t>
+              <a:t>occupancy grid · 높이 지도</a:t>
             </a:r>
           </a:p>
         </p:txBody>
@@ -6364,7 +6364,7 @@
         </p:nvSpPr>
         <p:spPr>
           <a:xfrm>
-            <a:off x="2474912" y="5765800"/>
+            <a:off x="2927350" y="5765800"/>
             <a:ext cx="759222" cy="330200"/>
           </a:xfrm>
           <a:prstGeom prst="roundRect">
@@ -6395,7 +6395,7 @@
         </p:nvSpPr>
         <p:spPr>
           <a:xfrm>
-            <a:off x="2614612" y="5816600"/>
+            <a:off x="3067050" y="5816600"/>
             <a:ext cx="519617" cy="336550"/>
           </a:xfrm>
           <a:prstGeom prst="rect">
@@ -6436,7 +6436,7 @@
         </p:nvSpPr>
         <p:spPr>
           <a:xfrm>
-            <a:off x="3335734" y="5765800"/>
+            <a:off x="3788172" y="5765800"/>
             <a:ext cx="1199753" cy="330200"/>
           </a:xfrm>
           <a:prstGeom prst="roundRect">
@@ -6467,7 +6467,7 @@
         </p:nvSpPr>
         <p:spPr>
           <a:xfrm>
-            <a:off x="3475434" y="5816600"/>
+            <a:off x="3927872" y="5816600"/>
             <a:ext cx="973364" cy="336550"/>
           </a:xfrm>
           <a:prstGeom prst="rect">
@@ -6508,7 +6508,7 @@
         </p:nvSpPr>
         <p:spPr>
           <a:xfrm>
-            <a:off x="4637088" y="5765800"/>
+            <a:off x="5089525" y="5765800"/>
             <a:ext cx="1167011" cy="330200"/>
           </a:xfrm>
           <a:prstGeom prst="roundRect">
@@ -6539,7 +6539,7 @@
         </p:nvSpPr>
         <p:spPr>
           <a:xfrm>
-            <a:off x="4776788" y="5816600"/>
+            <a:off x="5229225" y="5816600"/>
             <a:ext cx="939639" cy="336550"/>
           </a:xfrm>
           <a:prstGeom prst="rect">
@@ -6580,7 +6580,7 @@
         </p:nvSpPr>
         <p:spPr>
           <a:xfrm>
-            <a:off x="5905698" y="5765800"/>
+            <a:off x="6358136" y="5765800"/>
             <a:ext cx="1338362" cy="330200"/>
           </a:xfrm>
           <a:prstGeom prst="roundRect">
@@ -6611,7 +6611,7 @@
         </p:nvSpPr>
         <p:spPr>
           <a:xfrm>
-            <a:off x="6045398" y="5816600"/>
+            <a:off x="6497836" y="5816600"/>
             <a:ext cx="1116131" cy="336550"/>
           </a:xfrm>
           <a:prstGeom prst="rect">
@@ -9517,7 +9517,7 @@
                 <a:ea typeface="Malgun Gothic"/>
                 <a:cs typeface="Malgun Gothic"/>
               </a:rPr>
-              <a:t>확산 모델로 채움</a:t>
+              <a:t>diffusion 모델로 채움</a:t>
             </a:r>
           </a:p>
         </p:txBody>
@@ -9754,7 +9754,7 @@
                 <a:ea typeface="Malgun Gothic"/>
                 <a:cs typeface="Malgun Gothic"/>
               </a:rPr>
-              <a:t>상관 모델 대 칸 독립 궤적 표본 — arXiv:2510.19364</a:t>
+              <a:t>상관 모델 대 칸 독립 궤적 샘플 — arXiv:2510.19364</a:t>
             </a:r>
           </a:p>
         </p:txBody>
@@ -10952,7 +10952,7 @@
                 <a:ea typeface="Malgun Gothic"/>
                 <a:cs typeface="Malgun Gothic"/>
               </a:rPr>
-              <a:t>3D 점유 격자를 예측. FlashOcc는 2D 합성곱만 써 배포 친화</a:t>
+              <a:t>3D occupancy grid를 예측. FlashOcc는 2D 합성곱만 써 배포 친화</a:t>
             </a:r>
           </a:p>
         </p:txBody>
@@ -11794,7 +11794,7 @@
         </p:nvGraphicFramePr>
         <p:xfrm>
           <a:off x="711200" y="1361678"/>
-          <a:ext cx="10769601" cy="1757223"/>
+          <a:ext cx="10769600" cy="1757223"/>
         </p:xfrm>
         <a:graphic>
           <a:graphicData uri="http://schemas.openxmlformats.org/drawingml/2006/table">
@@ -11803,10 +11803,10 @@
                 <a:tableStyleId>{5C22544A-7EE6-4342-B048-85BDC9FD1C3A}</a:tableStyleId>
               </a:tblPr>
               <a:tblGrid>
-                <a:gridCol w="2793802"/>
-                <a:gridCol w="2654796"/>
-                <a:gridCol w="3039170"/>
-                <a:gridCol w="2281833"/>
+                <a:gridCol w="3314204"/>
+                <a:gridCol w="2481560"/>
+                <a:gridCol w="2840831"/>
+                <a:gridCol w="2133005"/>
               </a:tblGrid>
               <a:tr h="300067">
                 <a:tc>
@@ -11921,7 +11921,7 @@
                           <a:ea typeface="Malgun Gothic"/>
                           <a:cs typeface="Malgun Gothic"/>
                         </a:rPr>
-                        <a:t>2D 점유 격자(log-odds)</a:t>
+                        <a:t>2D occupancy grid(log-odds)</a:t>
                       </a:r>
                     </a:p>
                   </a:txBody>
@@ -13593,9 +13593,9 @@
                 <a:tableStyleId>{5C22544A-7EE6-4342-B048-85BDC9FD1C3A}</a:tableStyleId>
               </a:tblPr>
               <a:tblGrid>
-                <a:gridCol w="626963"/>
-                <a:gridCol w="2122686"/>
-                <a:gridCol w="2508151"/>
+                <a:gridCol w="647402"/>
+                <a:gridCol w="2192040"/>
+                <a:gridCol w="2418358"/>
               </a:tblGrid>
               <a:tr h="285477">
                 <a:tc>
@@ -13956,7 +13956,7 @@
                           <a:ea typeface="Malgun Gothic"/>
                           <a:cs typeface="Malgun Gothic"/>
                         </a:rPr>
-                        <a:t>고유 감각(proprioception) 비용</a:t>
+                        <a:t>proprioception 비용</a:t>
                       </a:r>
                     </a:p>
                   </a:txBody>
@@ -15318,7 +15318,7 @@
                 <a:ea typeface="Malgun Gothic"/>
                 <a:cs typeface="Malgun Gothic"/>
               </a:rPr>
-              <a:t>확산 inpainting으로 지나갈 수 없는 물체를 영상에 넣는다. AUROC 0.935 → 0.979, Orin INT8 11.6 FPS.</a:t>
+              <a:t>diffusion inpainting으로 지나갈 수 없는 물체를 영상에 넣는다. AUROC 0.935 → 0.979, Orin INT8 11.6 FPS.</a:t>
             </a:r>
           </a:p>
         </p:txBody>
@@ -15621,7 +15621,7 @@
                 <a:ea typeface="Malgun Gothic"/>
                 <a:cs typeface="Malgun Gothic"/>
               </a:rPr>
-              <a:t>양성 잠재 둘레 초구 밖을 이상으로 본다. LiDAR 기하만. Gazebo 10/10, 기하 규칙 4/10.</a:t>
+              <a:t>양성 latent를 둘러싼 초구 밖을 이상으로 본다. LiDAR 기하만. Gazebo 10/10, 기하 규칙 4/10.</a:t>
             </a:r>
           </a:p>
         </p:txBody>
@@ -15924,7 +15924,7 @@
                 <a:ea typeface="Malgun Gothic"/>
                 <a:cs typeface="Malgun Gothic"/>
               </a:rPr>
-              <a:t>양성과 라벨 없는 자료만으로 분류 위험을 편향 없이 추정한다. 개입 14회 → 2회(LHT).</a:t>
+              <a:t>양성과 라벨 없는 데이터만으로 분류 위험을 편향 없이 추정한다. 개입 14회 → 2회(LHT).</a:t>
             </a:r>
           </a:p>
         </p:txBody>
@@ -16120,7 +16120,7 @@
                 <a:ea typeface="Malgun Gothic"/>
                 <a:cs typeface="Malgun Gothic"/>
               </a:rPr>
-              <a:t>GSAT (Fig. 1): 궤적 양성과 잠재 초구로 정상·이상을 나눈다 — arXiv:2603.07480</a:t>
+              <a:t>GSAT (Fig. 1): 궤적 양성과 latent 초구로 정상·이상을 나눈다 — arXiv:2603.07480</a:t>
             </a:r>
           </a:p>
         </p:txBody>
@@ -19890,8 +19890,8 @@
                 <a:tableStyleId>{5C22544A-7EE6-4342-B048-85BDC9FD1C3A}</a:tableStyleId>
               </a:tblPr>
               <a:tblGrid>
-                <a:gridCol w="2565301"/>
-                <a:gridCol w="2692499"/>
+                <a:gridCol w="2482552"/>
+                <a:gridCol w="2775248"/>
               </a:tblGrid>
               <a:tr h="285477">
                 <a:tc>
@@ -20082,7 +20082,7 @@
                           <a:ea typeface="Malgun Gothic"/>
                           <a:cs typeface="Malgun Gothic"/>
                         </a:rPr>
-                        <a:t>영상 분할(지정·명사구)</a:t>
+                        <a:t>영상 분할(프롬프트·명사구)</a:t>
                       </a:r>
                     </a:p>
                   </a:txBody>
@@ -20132,7 +20132,7 @@
                           <a:ea typeface="Malgun Gothic"/>
                           <a:cs typeface="Malgun Gothic"/>
                         </a:rPr>
-                        <a:t>글로 지정한 물체 상자</a:t>
+                        <a:t>텍스트로 지정한 물체 상자</a:t>
                       </a:r>
                     </a:p>
                   </a:txBody>
@@ -20502,7 +20502,7 @@
                 <a:ea typeface="Malgun Gothic"/>
                 <a:cs typeface="Malgun Gothic"/>
               </a:rPr>
-              <a:t>고정 특징 위에 작은 머리만 학습해 몇 분 만에 적응(WVN).</a:t>
+              <a:t>고정 특징 위에 작은 head만 학습해 몇 분 만에 적응(WVN).</a:t>
             </a:r>
           </a:p>
         </p:txBody>
@@ -20665,7 +20665,7 @@
         <p:spPr>
           <a:xfrm>
             <a:off x="4567734" y="3884315"/>
-            <a:ext cx="660995" cy="241300"/>
+            <a:ext cx="955675" cy="241300"/>
           </a:xfrm>
           <a:prstGeom prst="roundRect">
             <a:avLst>
@@ -20696,7 +20696,7 @@
         <p:spPr>
           <a:xfrm>
             <a:off x="4656634" y="3909715"/>
-            <a:ext cx="523091" cy="288925"/>
+            <a:ext cx="826611" cy="288925"/>
           </a:xfrm>
           <a:prstGeom prst="rect">
             <a:avLst/>
@@ -20723,7 +20723,7 @@
                 <a:ea typeface="Malgun Gothic"/>
                 <a:cs typeface="Malgun Gothic"/>
               </a:rPr>
-              <a:t>가짜 라벨</a:t>
+              <a:t>pseudo-label</a:t>
             </a:r>
           </a:p>
         </p:txBody>
@@ -21026,7 +21026,7 @@
                 <a:ea typeface="Malgun Gothic"/>
                 <a:cs typeface="Malgun Gothic"/>
               </a:rPr>
-              <a:t>킥보드·볼라드처럼 학습 클래스 밖의 물체를 글로 지정.</a:t>
+              <a:t>킥보드·볼라드처럼 학습 클래스 밖의 물체를 텍스트로 지정.</a:t>
             </a:r>
           </a:p>
         </p:txBody>
@@ -21231,7 +21231,7 @@
                 <a:ea typeface="Malgun Gothic"/>
                 <a:cs typeface="Malgun Gothic"/>
               </a:rPr>
-              <a:t>단안 깊이는 모양을 주지만 축척은 따로 맞춰야 한다</a:t>
+              <a:t>단안 깊이는 모양을 주지만 스케일은 따로 맞춰야 한다</a:t>
             </a:r>
           </a:p>
         </p:txBody>
@@ -21534,7 +21534,7 @@
                 <a:ea typeface="Malgun Gothic"/>
                 <a:cs typeface="Malgun Gothic"/>
               </a:rPr>
-              <a:t>축척과 이동을 모른다. </a:t>
+              <a:t>스케일과 오프셋을 모른다. </a:t>
             </a:r>
             <a:r>
               <a:rPr sz="1150" b="0" i="1">
@@ -21859,7 +21859,7 @@
                 <a:ea typeface="Malgun Gothic"/>
                 <a:cs typeface="Malgun Gothic"/>
               </a:rPr>
-              <a:t>학습 분포의 카메라와 비슷할 때만 믿을 만하다. 처음 보는 렌즈·높이에서 축척이 틀린다.</a:t>
+              <a:t>학습 분포의 카메라와 비슷할 때만 믿을 만하다. 처음 보는 렌즈·높이에서 스케일이 틀린다.</a:t>
             </a:r>
           </a:p>
         </p:txBody>
@@ -21874,7 +21874,7 @@
         </p:nvGraphicFramePr>
         <p:xfrm>
           <a:off x="711200" y="2898279"/>
-          <a:ext cx="10769599" cy="1428987"/>
+          <a:ext cx="10769600" cy="1428987"/>
         </p:xfrm>
         <a:graphic>
           <a:graphicData uri="http://schemas.openxmlformats.org/drawingml/2006/table">
@@ -21883,9 +21883,9 @@
                 <a:tableStyleId>{5C22544A-7EE6-4342-B048-85BDC9FD1C3A}</a:tableStyleId>
               </a:tblPr>
               <a:tblGrid>
-                <a:gridCol w="2091035"/>
-                <a:gridCol w="3191073"/>
-                <a:gridCol w="5487491"/>
+                <a:gridCol w="1975048"/>
+                <a:gridCol w="3013968"/>
+                <a:gridCol w="5780584"/>
               </a:tblGrid>
               <a:tr h="292814">
                 <a:tc>
@@ -22234,7 +22234,7 @@
                           <a:ea typeface="Malgun Gothic"/>
                           <a:cs typeface="Malgun Gothic"/>
                         </a:rPr>
-                        <a:t>빈 곳 채우기, 가짜 라벨, 근거리 보조</a:t>
+                        <a:t>빈 곳 채우기, pseudo-label, 근거리 보조</a:t>
                       </a:r>
                     </a:p>
                   </a:txBody>
@@ -24615,7 +24615,7 @@
                 <a:ea typeface="Malgun Gothic"/>
                 <a:cs typeface="Malgun Gothic"/>
               </a:rPr>
-              <a:t>방향 전환·멈춤·상호작용을 모른다. 생성 예측(Trajectron++, MoFlow)은 상호작용이 문제일 때 본다.</a:t>
+              <a:t>방향 전환·멈춤·상호작용을 모른다. 생성 예측(Trajectron++, MoFlow)은 상호작용이 문제일 때 고려한다.</a:t>
             </a:r>
           </a:p>
         </p:txBody>
@@ -26234,7 +26234,7 @@
                 <a:ea typeface="Malgun Gothic"/>
                 <a:cs typeface="Malgun Gothic"/>
               </a:rPr>
-              <a:t>Conformal prediction: 보정 자료 n개의 오차를 순서대로 놓고 ⌈(n+1)(1−α)⌉번째를 반경으로 쓰면 분포 가정 없이 포함률 1−α를 보장한다. n이 작으면 실제 포함률이 흔들린다</a:t>
+              <a:t>Conformal prediction: 보정 데이터 n개의 오차를 순서대로 놓고 ⌈(n+1)(1−α)⌉번째를 반경으로 쓰면 분포 가정 없이 포함률 1−α를 보장한다. n이 작으면 실제 포함률이 흔들린다</a:t>
             </a:r>
           </a:p>
         </p:txBody>
@@ -26758,7 +26758,7 @@
                 <a:ea typeface="Malgun Gothic"/>
                 <a:cs typeface="Malgun Gothic"/>
               </a:rPr>
-              <a:t>지평별 conformal 문턱을 온라인으로 맞추고 MPC 해를 그 범위로 검사한다. 12명 정면 흐름 성공 100 %, 충돌 0 %(CoCoNav).</a:t>
+              <a:t>horizon별 conformal 임계값을 온라인으로 맞추고 MPC 해를 그 범위로 검사한다. 12명 정면 흐름 성공 100 %, 충돌 0 %(CoCoNav).</a:t>
             </a:r>
           </a:p>
         </p:txBody>
@@ -27076,7 +27076,7 @@
         </p:nvGraphicFramePr>
         <p:xfrm>
           <a:off x="711200" y="1361678"/>
-          <a:ext cx="10769600" cy="1757223"/>
+          <a:ext cx="10769601" cy="1757223"/>
         </p:xfrm>
         <a:graphic>
           <a:graphicData uri="http://schemas.openxmlformats.org/drawingml/2006/table">
@@ -27085,10 +27085,10 @@
                 <a:tableStyleId>{5C22544A-7EE6-4342-B048-85BDC9FD1C3A}</a:tableStyleId>
               </a:tblPr>
               <a:tblGrid>
-                <a:gridCol w="1203226"/>
-                <a:gridCol w="3087588"/>
-                <a:gridCol w="2856607"/>
-                <a:gridCol w="3622179"/>
+                <a:gridCol w="1201936"/>
+                <a:gridCol w="3084116"/>
+                <a:gridCol w="2853333"/>
+                <a:gridCol w="3630216"/>
               </a:tblGrid>
               <a:tr h="300067">
                 <a:tc>
@@ -27373,7 +27373,7 @@
                           <a:ea typeface="Malgun Gothic"/>
                           <a:cs typeface="Malgun Gothic"/>
                         </a:rPr>
-                        <a:t>성김 vs 축척</a:t>
+                        <a:t>성김 vs 스케일</a:t>
                       </a:r>
                     </a:p>
                   </a:txBody>
@@ -27667,7 +27667,7 @@
                           <a:ea typeface="Malgun Gothic"/>
                           <a:cs typeface="Malgun Gothic"/>
                         </a:rPr>
-                        <a:t>과신·과소신 vs 보정 자료 필요</a:t>
+                        <a:t>과신·과소신 vs 보정 데이터 필요</a:t>
                       </a:r>
                     </a:p>
                   </a:txBody>
@@ -28449,7 +28449,7 @@
                 <a:ea typeface="Malgun Gothic"/>
                 <a:cs typeface="Malgun Gothic"/>
               </a:rPr>
-              <a:t>비용 지도 → 2 경로 계획. 지도의 분산 σ와 사람 추적 → 3 제어의 위험·안전 장.</a:t>
+              <a:t>costmap → 2 경로 계획. 지도의 분산 σ와 사람 추적 → 3 제어의 위험·안전 장.</a:t>
             </a:r>
           </a:p>
         </p:txBody>
@@ -30883,7 +30883,7 @@
                 <a:ea typeface="Malgun Gothic"/>
                 <a:cs typeface="Malgun Gothic"/>
               </a:rPr>
-              <a:t>인식 구성 요소를 한 표로 본다</a:t>
+              <a:t>인식 구성 요소를 한 표로 정리한다</a:t>
             </a:r>
           </a:p>
         </p:txBody>
@@ -33504,11 +33504,11 @@
         <p:spPr>
           <a:xfrm>
             <a:off x="711200" y="1361678"/>
-            <a:ext cx="3488234" cy="1579761"/>
+            <a:ext cx="3488234" cy="1589881"/>
           </a:xfrm>
           <a:prstGeom prst="roundRect">
             <a:avLst>
-              <a:gd name="adj" fmla="val 4823"/>
+              <a:gd name="adj" fmla="val 4792"/>
             </a:avLst>
           </a:prstGeom>
           <a:solidFill>
@@ -33564,7 +33564,7 @@
         <p:spPr>
           <a:xfrm>
             <a:off x="4193084" y="1361678"/>
-            <a:ext cx="6350" cy="1579761"/>
+            <a:ext cx="6350" cy="1589881"/>
           </a:xfrm>
           <a:prstGeom prst="rect">
             <a:avLst/>
@@ -33592,7 +33592,7 @@
         </p:nvSpPr>
         <p:spPr>
           <a:xfrm>
-            <a:off x="711200" y="2935089"/>
+            <a:off x="711200" y="2945209"/>
             <a:ext cx="3488234" cy="6350"/>
           </a:xfrm>
           <a:prstGeom prst="rect">
@@ -33622,7 +33622,7 @@
         <p:spPr>
           <a:xfrm>
             <a:off x="711200" y="1361678"/>
-            <a:ext cx="50800" cy="1579761"/>
+            <a:ext cx="50800" cy="1589881"/>
           </a:xfrm>
           <a:prstGeom prst="roundRect">
             <a:avLst>
@@ -33766,7 +33766,7 @@
         <p:spPr>
           <a:xfrm>
             <a:off x="927100" y="2363589"/>
-            <a:ext cx="3219310" cy="327000"/>
+            <a:ext cx="3219310" cy="603200"/>
           </a:xfrm>
           <a:prstGeom prst="rect">
             <a:avLst/>
@@ -33793,7 +33793,7 @@
                 <a:ea typeface="Malgun Gothic"/>
                 <a:cs typeface="Malgun Gothic"/>
               </a:rPr>
-              <a:t>베이즈 필터, 칼만 필터, 점유 격자(9장), 센서 모델.</a:t>
+              <a:t>베이즈 필터, 칼만 필터, occupancy grid(9장), 센서 모델.</a:t>
             </a:r>
           </a:p>
         </p:txBody>
@@ -33807,11 +33807,11 @@
         <p:spPr>
           <a:xfrm>
             <a:off x="4351834" y="1361678"/>
-            <a:ext cx="3488234" cy="1579761"/>
+            <a:ext cx="3488234" cy="1589881"/>
           </a:xfrm>
           <a:prstGeom prst="roundRect">
             <a:avLst>
-              <a:gd name="adj" fmla="val 4823"/>
+              <a:gd name="adj" fmla="val 4792"/>
             </a:avLst>
           </a:prstGeom>
           <a:solidFill>
@@ -33867,7 +33867,7 @@
         <p:spPr>
           <a:xfrm>
             <a:off x="7833717" y="1361678"/>
-            <a:ext cx="6350" cy="1579761"/>
+            <a:ext cx="6350" cy="1589881"/>
           </a:xfrm>
           <a:prstGeom prst="rect">
             <a:avLst/>
@@ -33895,7 +33895,7 @@
         </p:nvSpPr>
         <p:spPr>
           <a:xfrm>
-            <a:off x="4351834" y="2935089"/>
+            <a:off x="4351834" y="2945209"/>
             <a:ext cx="3488234" cy="6350"/>
           </a:xfrm>
           <a:prstGeom prst="rect">
@@ -33925,7 +33925,7 @@
         <p:spPr>
           <a:xfrm>
             <a:off x="4351834" y="1361678"/>
-            <a:ext cx="50800" cy="1579761"/>
+            <a:ext cx="50800" cy="1589881"/>
           </a:xfrm>
           <a:prstGeom prst="roundRect">
             <a:avLst>
@@ -34110,11 +34110,11 @@
         <p:spPr>
           <a:xfrm>
             <a:off x="7992467" y="1361678"/>
-            <a:ext cx="3488234" cy="1579761"/>
+            <a:ext cx="3488234" cy="1589881"/>
           </a:xfrm>
           <a:prstGeom prst="roundRect">
             <a:avLst>
-              <a:gd name="adj" fmla="val 4823"/>
+              <a:gd name="adj" fmla="val 4792"/>
             </a:avLst>
           </a:prstGeom>
           <a:solidFill>
@@ -34170,7 +34170,7 @@
         <p:spPr>
           <a:xfrm>
             <a:off x="11474351" y="1361678"/>
-            <a:ext cx="6350" cy="1579761"/>
+            <a:ext cx="6350" cy="1589881"/>
           </a:xfrm>
           <a:prstGeom prst="rect">
             <a:avLst/>
@@ -34198,7 +34198,7 @@
         </p:nvSpPr>
         <p:spPr>
           <a:xfrm>
-            <a:off x="7992467" y="2935089"/>
+            <a:off x="7992467" y="2945209"/>
             <a:ext cx="3488234" cy="6350"/>
           </a:xfrm>
           <a:prstGeom prst="rect">
@@ -34228,7 +34228,7 @@
         <p:spPr>
           <a:xfrm>
             <a:off x="7992467" y="1361678"/>
-            <a:ext cx="50800" cy="1579761"/>
+            <a:ext cx="50800" cy="1589881"/>
           </a:xfrm>
           <a:prstGeom prst="roundRect">
             <a:avLst>
@@ -34413,7 +34413,7 @@
           <p:nvPr/>
         </p:nvGraphicFramePr>
         <p:xfrm>
-          <a:off x="711200" y="3119239"/>
+          <a:off x="711200" y="3129359"/>
           <a:ext cx="10769600" cy="1392302"/>
         </p:xfrm>
         <a:graphic>
@@ -35014,7 +35014,7 @@
                 <a:ea typeface="Malgun Gothic"/>
                 <a:cs typeface="Malgun Gothic"/>
               </a:rPr>
-              <a:t>점유는 log-odds, 높이는 분산 가중 평균. 실외는 2.5D가 표준.</a:t>
+              <a:t>occupancy는 log-odds, 높이는 분산 가중 평균. 실외는 2.5D가 표준.</a:t>
             </a:r>
           </a:p>
         </p:txBody>
@@ -36301,9 +36301,9 @@
                 <a:tableStyleId>{5C22544A-7EE6-4342-B048-85BDC9FD1C3A}</a:tableStyleId>
               </a:tblPr>
               <a:tblGrid>
-                <a:gridCol w="480616"/>
-                <a:gridCol w="6976070"/>
-                <a:gridCol w="3312914"/>
+                <a:gridCol w="468809"/>
+                <a:gridCol w="6805116"/>
+                <a:gridCol w="3495675"/>
               </a:tblGrid>
               <a:tr h="285477">
                 <a:tc>
@@ -36442,7 +36442,7 @@
                           <a:ea typeface="Malgun Gothic"/>
                           <a:cs typeface="Malgun Gothic"/>
                         </a:rPr>
-                        <a:t>베이즈 필터, 칼만 필터, 점유 격자의 표준 설명</a:t>
+                        <a:t>베이즈 필터, 칼만 필터, occupancy grid의 표준 설명</a:t>
                       </a:r>
                     </a:p>
                   </a:txBody>
@@ -36516,7 +36516,7 @@
                           <a:ea typeface="Malgun Gothic"/>
                           <a:cs typeface="Malgun Gothic"/>
                         </a:rPr>
-                        <a:t>점유 격자와 확률 갱신의 원 논문</a:t>
+                        <a:t>occupancy grid와 확률 갱신의 원 논문</a:t>
                       </a:r>
                     </a:p>
                   </a:txBody>
@@ -37967,7 +37967,7 @@
                 <a:ea typeface="Malgun Gothic"/>
                 <a:cs typeface="Malgun Gothic"/>
               </a:rPr>
-              <a:t>믿음 × 새 증거</a:t>
+              <a:t>belief × 새 증거</a:t>
             </a:r>
           </a:p>
         </p:txBody>
@@ -38019,7 +38019,7 @@
                 <a:ea typeface="Malgun Gothic"/>
                 <a:cs typeface="Malgun Gothic"/>
               </a:rPr>
-              <a:t>. 지도는 관측을 하나씩 더해 가는 믿음이다.</a:t>
+              <a:t>. 지도는 관측을 하나씩 더해 가는 belief다.</a:t>
             </a:r>
           </a:p>
         </p:txBody>
@@ -40826,7 +40826,7 @@
         </p:nvGraphicFramePr>
         <p:xfrm>
           <a:off x="711200" y="3396159"/>
-          <a:ext cx="10769599" cy="1114921"/>
+          <a:ext cx="10769601" cy="1114921"/>
         </p:xfrm>
         <a:graphic>
           <a:graphicData uri="http://schemas.openxmlformats.org/drawingml/2006/table">
@@ -40835,10 +40835,10 @@
                 <a:tableStyleId>{5C22544A-7EE6-4342-B048-85BDC9FD1C3A}</a:tableStyleId>
               </a:tblPr>
               <a:tblGrid>
-                <a:gridCol w="2051149"/>
-                <a:gridCol w="2362299"/>
-                <a:gridCol w="2167731"/>
-                <a:gridCol w="4188420"/>
+                <a:gridCol w="2289473"/>
+                <a:gridCol w="2666008"/>
+                <a:gridCol w="1982887"/>
+                <a:gridCol w="3831233"/>
               </a:tblGrid>
               <a:tr h="285477">
                 <a:tc>
@@ -40953,7 +40953,7 @@
                           <a:ea typeface="Malgun Gothic"/>
                           <a:cs typeface="Malgun Gothic"/>
                         </a:rPr>
-                        <a:t>2D 점유 격자</a:t>
+                        <a:t>2D occupancy grid</a:t>
                       </a:r>
                     </a:p>
                   </a:txBody>
@@ -40977,7 +40977,7 @@
                           <a:ea typeface="Malgun Gothic"/>
                           <a:cs typeface="Malgun Gothic"/>
                         </a:rPr>
-                        <a:t>칸마다 점유 확률</a:t>
+                        <a:t>칸마다 occupancy 확률</a:t>
                       </a:r>
                     </a:p>
                   </a:txBody>
@@ -41173,7 +41173,7 @@
                           <a:ea typeface="Malgun Gothic"/>
                           <a:cs typeface="Malgun Gothic"/>
                         </a:rPr>
-                        <a:t>칸마다 점유·거리</a:t>
+                        <a:t>칸마다 occupancy·거리</a:t>
                       </a:r>
                     </a:p>
                   </a:txBody>
@@ -41749,7 +41749,7 @@
                           <a:ea typeface="Malgun Gothic"/>
                           <a:cs typeface="Malgun Gothic"/>
                         </a:rPr>
-                        <a:t>축척을 모른다, 조명·날씨</a:t>
+                        <a:t>스케일을 모른다, 조명·날씨</a:t>
                       </a:r>
                     </a:p>
                   </a:txBody>
@@ -42205,7 +42205,7 @@
                 <a:ea typeface="Malgun Gothic"/>
                 <a:cs typeface="Malgun Gothic"/>
               </a:rPr>
-              <a:t>점유는 log-odds로, 높이는 분산 가중 평균으로. 위험한 것은 아예 관측되지 않는 칸이다.</a:t>
+              <a:t>occupancy는 log-odds로, 높이는 분산 가중 평균으로. 위험한 것은 아예 관측되지 않는 칸이다.</a:t>
             </a:r>
           </a:p>
         </p:txBody>
@@ -42272,7 +42272,7 @@
                 <a:ea typeface="Malgun Gothic"/>
                 <a:cs typeface="Malgun Gothic"/>
               </a:rPr>
-              <a:t>1 · 점유 격자</a:t>
+              <a:t>1 · occupancy grid</a:t>
             </a:r>
           </a:p>
         </p:txBody>
@@ -42313,7 +42313,7 @@
                 <a:ea typeface="Malgun Gothic"/>
                 <a:cs typeface="Malgun Gothic"/>
               </a:rPr>
-              <a:t>점유 격자는 관측마다 log-odds를 더해 확률을 쌓는다</a:t>
+              <a:t>occupancy grid는 관측마다 log-odds를 더해 확률을 쌓는다</a:t>
             </a:r>
           </a:p>
         </p:txBody>
@@ -42497,7 +42497,7 @@
                 <a:ea typeface="Malgun Gothic"/>
                 <a:cs typeface="Malgun Gothic"/>
               </a:rPr>
-              <a:t>로봇(주황)이 움직이며 광선을 쏜다. 광선이 지나간 칸은 비었다는 증거를, 끝점은 점유 증거를 더한다. 10 % 놓침과 3 % 헛반사가 있어도 관측이 쌓이면 벽이 드러난다</a:t>
+              <a:t>로봇(주황)이 움직이며 광선을 쏜다. 광선이 지나간 칸은 비었다는 증거를, 끝점은 막혔다는 증거를 더한다. 10 % 놓침과 3 % 헛반사가 있어도 관측이 쌓이면 벽이 드러난다</a:t>
             </a:r>
           </a:p>
         </p:txBody>
